--- a/public/presentation_2503.pptx
+++ b/public/presentation_2503.pptx
@@ -16225,7 +16225,7 @@
           <a:bodyPr/>
           <a:lstStyle/>
           <a:p>
-            <a:endParaRPr lang="en-US"/>
+            <a:endParaRPr lang="en-US" dirty="0"/>
           </a:p>
         </p:txBody>
       </p:sp>
@@ -16289,21 +16289,12 @@
           <a:bodyPr wrap="square" lIns="0" tIns="0" rIns="0" bIns="0" rtlCol="0" anchor="ctr"/>
           <a:lstStyle/>
           <a:p>
-            <a:pPr marL="0" indent="0">
-              <a:buNone/>
-            </a:pPr>
-            <a:r>
-              <a:rPr lang="en-US" sz="1200" dirty="0">
-                <a:solidFill>
-                  <a:srgbClr val="333333"/>
-                </a:solidFill>
-                <a:latin typeface="Calibri" pitchFamily="34" charset="0"/>
-                <a:ea typeface="Calibri" pitchFamily="34" charset="-122"/>
-                <a:cs typeface="Calibri" pitchFamily="34" charset="-120"/>
-              </a:rPr>
-              <a:t>Szebehely V. Theory of Orbits: The Restricted Problem of Three Bodies. Academic Press, 1967</a:t>
-            </a:r>
-            <a:endParaRPr lang="en-US" sz="1200" dirty="0"/>
+            <a:r>
+              <a:rPr lang="ru-RU" sz="1200" dirty="0">
+                <a:effectLst/>
+              </a:rPr>
+              <a:t>Белецкий В.В. - «Очерки о движении космических тел»</a:t>
+            </a:r>
           </a:p>
         </p:txBody>
       </p:sp>
@@ -16394,21 +16385,18 @@
           <a:bodyPr wrap="square" lIns="0" tIns="0" rIns="0" bIns="0" rtlCol="0" anchor="ctr"/>
           <a:lstStyle/>
           <a:p>
-            <a:pPr marL="0" indent="0">
-              <a:buNone/>
-            </a:pPr>
-            <a:r>
-              <a:rPr lang="en-US" sz="1200" dirty="0">
-                <a:solidFill>
-                  <a:srgbClr val="333333"/>
-                </a:solidFill>
-                <a:latin typeface="Calibri" pitchFamily="34" charset="0"/>
-                <a:ea typeface="Calibri" pitchFamily="34" charset="-122"/>
-                <a:cs typeface="Calibri" pitchFamily="34" charset="-120"/>
-              </a:rPr>
-              <a:t>Richardson D.L. Analytic construction of periodic orbits about the collinear points. Celestial Mechanics, 22(3), 1980</a:t>
-            </a:r>
-            <a:endParaRPr lang="en-US" sz="1200" dirty="0"/>
+            <a:r>
+              <a:rPr lang="ru-RU" sz="1200" dirty="0" err="1">
+                <a:effectLst/>
+              </a:rPr>
+              <a:t>Дубошин</a:t>
+            </a:r>
+            <a:r>
+              <a:rPr lang="ru-RU" sz="1200" dirty="0">
+                <a:effectLst/>
+              </a:rPr>
+              <a:t> Г.Н. - «Небесная механика. Основные задачи и методы»</a:t>
+            </a:r>
           </a:p>
         </p:txBody>
       </p:sp>
@@ -16499,21 +16487,18 @@
           <a:bodyPr wrap="square" lIns="0" tIns="0" rIns="0" bIns="0" rtlCol="0" anchor="ctr"/>
           <a:lstStyle/>
           <a:p>
-            <a:pPr marL="0" indent="0">
-              <a:buNone/>
-            </a:pPr>
-            <a:r>
-              <a:rPr lang="en-US" sz="1200" dirty="0">
-                <a:solidFill>
-                  <a:srgbClr val="333333"/>
-                </a:solidFill>
-                <a:latin typeface="Calibri" pitchFamily="34" charset="0"/>
-                <a:ea typeface="Calibri" pitchFamily="34" charset="-122"/>
-                <a:cs typeface="Calibri" pitchFamily="34" charset="-120"/>
-              </a:rPr>
-              <a:t>Hairer E., Lubich C., Wanner G. Geometric Numerical Integration. Springer, 2006</a:t>
-            </a:r>
-            <a:endParaRPr lang="en-US" sz="1200" dirty="0"/>
+            <a:r>
+              <a:rPr lang="ru-RU" sz="1200" dirty="0" err="1">
+                <a:effectLst/>
+              </a:rPr>
+              <a:t>Охоцимский</a:t>
+            </a:r>
+            <a:r>
+              <a:rPr lang="ru-RU" sz="1200" dirty="0">
+                <a:effectLst/>
+              </a:rPr>
+              <a:t> Д.Е., Сихарулидзе Ю.Г. - «Основы механики космического полёта»</a:t>
+            </a:r>
           </a:p>
         </p:txBody>
       </p:sp>
@@ -16540,7 +16525,7 @@
           <a:bodyPr/>
           <a:lstStyle/>
           <a:p>
-            <a:endParaRPr lang="en-US"/>
+            <a:endParaRPr lang="en-US" dirty="0"/>
           </a:p>
         </p:txBody>
       </p:sp>
@@ -16604,21 +16589,31 @@
           <a:bodyPr wrap="square" lIns="0" tIns="0" rIns="0" bIns="0" rtlCol="0" anchor="ctr"/>
           <a:lstStyle/>
           <a:p>
-            <a:pPr marL="0" indent="0">
-              <a:buNone/>
-            </a:pPr>
-            <a:r>
-              <a:rPr lang="en-US" sz="1200" dirty="0">
-                <a:solidFill>
-                  <a:srgbClr val="333333"/>
-                </a:solidFill>
-                <a:latin typeface="Calibri" pitchFamily="34" charset="0"/>
-                <a:ea typeface="Calibri" pitchFamily="34" charset="-122"/>
-                <a:cs typeface="Calibri" pitchFamily="34" charset="-120"/>
-              </a:rPr>
-              <a:t>Koon W.S. et al. Dynamical Systems, the Three-Body Problem and Space Mission Design. Marsden Books, 2011</a:t>
-            </a:r>
-            <a:endParaRPr lang="en-US" sz="1200" dirty="0"/>
+            <a:r>
+              <a:rPr lang="ru-RU" sz="1200" dirty="0"/>
+              <a:t>Целоусова А.А - </a:t>
+            </a:r>
+            <a:r>
+              <a:rPr lang="ru-RU" sz="1200" dirty="0">
+                <a:effectLst/>
+              </a:rPr>
+              <a:t>«</a:t>
+            </a:r>
+            <a:r>
+              <a:rPr lang="ru-RU" sz="1200" b="0" i="0" u="none" strike="noStrike" dirty="0">
+                <a:effectLst/>
+              </a:rPr>
+              <a:t>Численно-аналитические методы построения траекторий в задачах трёх и четырёх тел</a:t>
+            </a:r>
+            <a:r>
+              <a:rPr lang="ru-RU" sz="1200" dirty="0">
+                <a:effectLst/>
+              </a:rPr>
+              <a:t>»</a:t>
+            </a:r>
+            <a:endParaRPr lang="ru-RU" sz="1200" b="0" i="0" u="none" strike="noStrike" dirty="0">
+              <a:effectLst/>
+            </a:endParaRPr>
           </a:p>
         </p:txBody>
       </p:sp>
@@ -16709,124 +16704,64 @@
           <a:bodyPr wrap="square" lIns="0" tIns="0" rIns="0" bIns="0" rtlCol="0" anchor="ctr"/>
           <a:lstStyle/>
           <a:p>
-            <a:pPr marL="0" indent="0">
-              <a:buNone/>
-            </a:pPr>
-            <a:r>
-              <a:rPr lang="en-US" sz="1200" dirty="0">
-                <a:solidFill>
-                  <a:srgbClr val="333333"/>
-                </a:solidFill>
-                <a:latin typeface="Calibri" pitchFamily="34" charset="0"/>
-                <a:ea typeface="Calibri" pitchFamily="34" charset="-122"/>
-                <a:cs typeface="Calibri" pitchFamily="34" charset="-120"/>
-              </a:rPr>
-              <a:t>Farquhar R.W. The Control and Use of Libration-Point Satellites. NASA TR R-346, 1968</a:t>
-            </a:r>
-            <a:endParaRPr lang="en-US" sz="1200" dirty="0"/>
-          </a:p>
-        </p:txBody>
-      </p:sp>
-      <p:sp>
-        <p:nvSpPr>
-          <p:cNvPr id="19" name="Shape 17"/>
-          <p:cNvSpPr/>
-          <p:nvPr/>
-        </p:nvSpPr>
-        <p:spPr>
-          <a:xfrm>
-            <a:off x="640080" y="3657600"/>
-            <a:ext cx="7863840" cy="438912"/>
-          </a:xfrm>
-          <a:prstGeom prst="rect">
-            <a:avLst/>
-          </a:prstGeom>
-          <a:solidFill>
-            <a:srgbClr val="FFFFFF"/>
-          </a:solidFill>
-          <a:ln/>
-        </p:spPr>
-        <p:txBody>
-          <a:bodyPr/>
-          <a:lstStyle/>
-          <a:p>
-            <a:endParaRPr lang="en-US"/>
-          </a:p>
-        </p:txBody>
-      </p:sp>
-      <p:sp>
-        <p:nvSpPr>
-          <p:cNvPr id="20" name="Text 18"/>
-          <p:cNvSpPr/>
-          <p:nvPr/>
-        </p:nvSpPr>
-        <p:spPr>
-          <a:xfrm>
-            <a:off x="777240" y="3675888"/>
-            <a:ext cx="365760" cy="402336"/>
-          </a:xfrm>
-          <a:prstGeom prst="rect">
-            <a:avLst/>
-          </a:prstGeom>
-          <a:noFill/>
-          <a:ln/>
-        </p:spPr>
-        <p:txBody>
-          <a:bodyPr wrap="square" lIns="0" tIns="0" rIns="0" bIns="0" rtlCol="0" anchor="ctr"/>
-          <a:lstStyle/>
-          <a:p>
-            <a:pPr marL="0" indent="0">
-              <a:buNone/>
-            </a:pPr>
-            <a:r>
-              <a:rPr lang="en-US" sz="1300" b="1" dirty="0">
-                <a:solidFill>
-                  <a:srgbClr val="1A1A1A"/>
-                </a:solidFill>
-                <a:latin typeface="Calibri" pitchFamily="34" charset="0"/>
-                <a:ea typeface="Calibri" pitchFamily="34" charset="-122"/>
-                <a:cs typeface="Calibri" pitchFamily="34" charset="-120"/>
-              </a:rPr>
-              <a:t>[6]</a:t>
-            </a:r>
-            <a:endParaRPr lang="en-US" sz="1300" dirty="0"/>
-          </a:p>
-        </p:txBody>
-      </p:sp>
-      <p:sp>
-        <p:nvSpPr>
-          <p:cNvPr id="21" name="Text 19"/>
-          <p:cNvSpPr/>
-          <p:nvPr/>
-        </p:nvSpPr>
-        <p:spPr>
-          <a:xfrm>
-            <a:off x="1188720" y="3675888"/>
-            <a:ext cx="7132320" cy="402336"/>
-          </a:xfrm>
-          <a:prstGeom prst="rect">
-            <a:avLst/>
-          </a:prstGeom>
-          <a:noFill/>
-          <a:ln/>
-        </p:spPr>
-        <p:txBody>
-          <a:bodyPr wrap="square" lIns="0" tIns="0" rIns="0" bIns="0" rtlCol="0" anchor="ctr"/>
-          <a:lstStyle/>
-          <a:p>
-            <a:pPr marL="0" indent="0">
-              <a:buNone/>
-            </a:pPr>
-            <a:r>
-              <a:rPr lang="en-US" sz="1200" dirty="0">
-                <a:solidFill>
-                  <a:srgbClr val="333333"/>
-                </a:solidFill>
-                <a:latin typeface="Calibri" pitchFamily="34" charset="0"/>
-                <a:ea typeface="Calibri" pitchFamily="34" charset="-122"/>
-                <a:cs typeface="Calibri" pitchFamily="34" charset="-120"/>
-              </a:rPr>
-              <a:t>NASA. Apollo by the Numbers. NASA History Division — S-IVB TLI, free-return trajectories</a:t>
+            <a:r>
+              <a:rPr lang="en-US" sz="1200" dirty="0"/>
+              <a:t>Dmitri </a:t>
+            </a:r>
+            <a:r>
+              <a:rPr lang="en-US" sz="1200" dirty="0" err="1"/>
+              <a:t>Rozmanov</a:t>
+            </a:r>
+            <a:r>
+              <a:rPr lang="en-US" sz="1200" dirty="0"/>
+              <a:t>, Peter G </a:t>
+            </a:r>
+            <a:r>
+              <a:rPr lang="en-US" sz="1200" dirty="0" err="1"/>
+              <a:t>Kusalik</a:t>
+            </a:r>
+            <a:r>
+              <a:rPr lang="en-US" sz="1200" dirty="0"/>
+              <a:t> - </a:t>
+            </a:r>
+            <a:r>
+              <a:rPr lang="ru-RU" sz="1200" dirty="0">
+                <a:effectLst/>
+              </a:rPr>
+              <a:t>«</a:t>
+            </a:r>
+            <a:r>
+              <a:rPr lang="en-GB" sz="1200" b="0" i="0" u="none" strike="noStrike" dirty="0">
+                <a:solidFill>
+                  <a:srgbClr val="111111"/>
+                </a:solidFill>
+                <a:effectLst/>
+              </a:rPr>
+              <a:t>Robust rotational-velocity-</a:t>
+            </a:r>
+            <a:r>
+              <a:rPr lang="en-GB" sz="1200" b="0" i="0" u="none" strike="noStrike" dirty="0" err="1">
+                <a:solidFill>
+                  <a:srgbClr val="111111"/>
+                </a:solidFill>
+                <a:effectLst/>
+              </a:rPr>
+              <a:t>Verlet</a:t>
+            </a:r>
+            <a:r>
+              <a:rPr lang="en-GB" sz="1200" b="0" i="0" u="none" strike="noStrike" dirty="0">
+                <a:solidFill>
+                  <a:srgbClr val="111111"/>
+                </a:solidFill>
+                <a:effectLst/>
+              </a:rPr>
+              <a:t> integration methods</a:t>
+            </a:r>
+            <a:r>
+              <a:rPr lang="ru-RU" sz="1200" dirty="0">
+                <a:effectLst/>
+              </a:rPr>
+              <a:t>»</a:t>
             </a:r>
             <a:endParaRPr lang="en-US" sz="1200" dirty="0"/>
           </a:p>
